--- a/lab_3/narrow_bridge_problem.pptx
+++ b/lab_3/narrow_bridge_problem.pptx
@@ -212,7 +212,7 @@
           <a:p>
             <a:fld id="{69C4141D-E9BE-0C46-80A1-2BC8B33B96AA}" type="datetimeFigureOut">
               <a:rPr lang="en-US" smtClean="0"/>
-              <a:t>10/1/26</a:t>
+              <a:t>10/5/26</a:t>
             </a:fld>
             <a:endParaRPr lang="en-US"/>
           </a:p>
@@ -1426,7 +1426,7 @@
           <a:p>
             <a:fld id="{371290E0-1C66-574A-B447-327DB413E415}" type="datetimeFigureOut">
               <a:rPr lang="en-US" smtClean="0"/>
-              <a:t>10/1/26</a:t>
+              <a:t>10/5/26</a:t>
             </a:fld>
             <a:endParaRPr lang="en-US"/>
           </a:p>
@@ -1624,7 +1624,7 @@
           <a:p>
             <a:fld id="{371290E0-1C66-574A-B447-327DB413E415}" type="datetimeFigureOut">
               <a:rPr lang="en-US" smtClean="0"/>
-              <a:t>10/1/26</a:t>
+              <a:t>10/5/26</a:t>
             </a:fld>
             <a:endParaRPr lang="en-US"/>
           </a:p>
@@ -1832,7 +1832,7 @@
           <a:p>
             <a:fld id="{371290E0-1C66-574A-B447-327DB413E415}" type="datetimeFigureOut">
               <a:rPr lang="en-US" smtClean="0"/>
-              <a:t>10/1/26</a:t>
+              <a:t>10/5/26</a:t>
             </a:fld>
             <a:endParaRPr lang="en-US"/>
           </a:p>
@@ -2030,7 +2030,7 @@
           <a:p>
             <a:fld id="{371290E0-1C66-574A-B447-327DB413E415}" type="datetimeFigureOut">
               <a:rPr lang="en-US" smtClean="0"/>
-              <a:t>10/1/26</a:t>
+              <a:t>10/5/26</a:t>
             </a:fld>
             <a:endParaRPr lang="en-US"/>
           </a:p>
@@ -2305,7 +2305,7 @@
           <a:p>
             <a:fld id="{371290E0-1C66-574A-B447-327DB413E415}" type="datetimeFigureOut">
               <a:rPr lang="en-US" smtClean="0"/>
-              <a:t>10/1/26</a:t>
+              <a:t>10/5/26</a:t>
             </a:fld>
             <a:endParaRPr lang="en-US"/>
           </a:p>
@@ -2570,7 +2570,7 @@
           <a:p>
             <a:fld id="{371290E0-1C66-574A-B447-327DB413E415}" type="datetimeFigureOut">
               <a:rPr lang="en-US" smtClean="0"/>
-              <a:t>10/1/26</a:t>
+              <a:t>10/5/26</a:t>
             </a:fld>
             <a:endParaRPr lang="en-US"/>
           </a:p>
@@ -2982,7 +2982,7 @@
           <a:p>
             <a:fld id="{371290E0-1C66-574A-B447-327DB413E415}" type="datetimeFigureOut">
               <a:rPr lang="en-US" smtClean="0"/>
-              <a:t>10/1/26</a:t>
+              <a:t>10/5/26</a:t>
             </a:fld>
             <a:endParaRPr lang="en-US"/>
           </a:p>
@@ -3123,7 +3123,7 @@
           <a:p>
             <a:fld id="{371290E0-1C66-574A-B447-327DB413E415}" type="datetimeFigureOut">
               <a:rPr lang="en-US" smtClean="0"/>
-              <a:t>10/1/26</a:t>
+              <a:t>10/5/26</a:t>
             </a:fld>
             <a:endParaRPr lang="en-US"/>
           </a:p>
@@ -3236,7 +3236,7 @@
           <a:p>
             <a:fld id="{371290E0-1C66-574A-B447-327DB413E415}" type="datetimeFigureOut">
               <a:rPr lang="en-US" smtClean="0"/>
-              <a:t>10/1/26</a:t>
+              <a:t>10/5/26</a:t>
             </a:fld>
             <a:endParaRPr lang="en-US"/>
           </a:p>
@@ -3547,7 +3547,7 @@
           <a:p>
             <a:fld id="{371290E0-1C66-574A-B447-327DB413E415}" type="datetimeFigureOut">
               <a:rPr lang="en-US" smtClean="0"/>
-              <a:t>10/1/26</a:t>
+              <a:t>10/5/26</a:t>
             </a:fld>
             <a:endParaRPr lang="en-US"/>
           </a:p>
@@ -3835,7 +3835,7 @@
           <a:p>
             <a:fld id="{371290E0-1C66-574A-B447-327DB413E415}" type="datetimeFigureOut">
               <a:rPr lang="en-US" smtClean="0"/>
-              <a:t>10/1/26</a:t>
+              <a:t>10/5/26</a:t>
             </a:fld>
             <a:endParaRPr lang="en-US"/>
           </a:p>
@@ -4076,7 +4076,7 @@
           <a:p>
             <a:fld id="{371290E0-1C66-574A-B447-327DB413E415}" type="datetimeFigureOut">
               <a:rPr lang="en-US" smtClean="0"/>
-              <a:t>10/1/26</a:t>
+              <a:t>10/5/26</a:t>
             </a:fld>
             <a:endParaRPr lang="en-US"/>
           </a:p>
@@ -8567,11 +8567,7 @@
               <a:t>        </a:t>
             </a:r>
             <a:r>
-              <a:rPr lang="en-US" sz="2400" dirty="0" err="1">
-                <a:highlight>
-                  <a:srgbClr val="FFFF00"/>
-                </a:highlight>
-              </a:rPr>
+              <a:rPr lang="en-US" sz="2400" dirty="0" err="1"/>
               <a:t>cond_signal</a:t>
             </a:r>
             <a:r>
@@ -8593,19 +8589,7 @@
             </a:pPr>
             <a:r>
               <a:rPr lang="en-US" sz="2400" dirty="0"/>
-              <a:t>    } else if (</a:t>
-            </a:r>
-            <a:r>
-              <a:rPr lang="en-US" sz="2400" dirty="0">
-                <a:highlight>
-                  <a:srgbClr val="FFFF00"/>
-                </a:highlight>
-              </a:rPr>
-              <a:t>cars == 0</a:t>
-            </a:r>
-            <a:r>
-              <a:rPr lang="en-US" sz="2400" dirty="0"/>
-              <a:t>) {</a:t>
+              <a:t>    } else if (cars == 0) {</a:t>
             </a:r>
           </a:p>
           <a:p>
@@ -8617,11 +8601,7 @@
               <a:t>        </a:t>
             </a:r>
             <a:r>
-              <a:rPr lang="en-US" sz="2400" dirty="0" err="1">
-                <a:highlight>
-                  <a:srgbClr val="FFFF00"/>
-                </a:highlight>
-              </a:rPr>
+              <a:rPr lang="en-US" sz="2400" dirty="0" err="1"/>
               <a:t>cond_broadcast</a:t>
             </a:r>
             <a:r>
@@ -11053,19 +11033,7 @@
               <a:rPr lang="en-US" sz="2400" dirty="0">
                 <a:latin typeface="Aptos" panose="020B0004020202020204" pitchFamily="34" charset="0"/>
               </a:rPr>
-              <a:t>… // here </a:t>
-            </a:r>
-            <a:r>
-              <a:rPr lang="en-US" sz="2400" dirty="0" err="1">
-                <a:latin typeface="Aptos" panose="020B0004020202020204" pitchFamily="34" charset="0"/>
-              </a:rPr>
-              <a:t>max_size</a:t>
-            </a:r>
-            <a:r>
-              <a:rPr lang="en-US" sz="2400" dirty="0">
-                <a:latin typeface="Aptos" panose="020B0004020202020204" pitchFamily="34" charset="0"/>
-              </a:rPr>
-              <a:t>=19</a:t>
+              <a:t>… // here count=19</a:t>
             </a:r>
           </a:p>
           <a:p>
